--- a/dist/초5/사회·역사/역사와생활/초5_사회·역사_역사와생활_04_조선.pptx
+++ b/dist/초5/사회·역사/역사와생활/초5_사회·역사_역사와생활_04_조선.pptx
@@ -120,13 +120,13 @@
   <p:extLst>
     <p:ext uri="{521415D9-36F7-43E2-AB2F-B90AF26B5E84}">
       <p14:sectionLst xmlns:p14="http://schemas.microsoft.com/office/powerpoint/2010/main">
-        <p14:section name="도입" id="{10795b5a-c40e-5176-bea6-02ebd1366832}">
+        <p14:section name="도입" id="{ac838675-aadc-735c-5811-5731062a5667}">
           <p14:sldIdLst>
             <p14:sldId id="256"/>
             <p14:sldId id="257"/>
           </p14:sldIdLst>
         </p14:section>
-        <p14:section name="개념" id="{46d6e308-9192-8623-4592-d882b897315c}">
+        <p14:section name="개념" id="{e4c4a5d5-066c-68b6-2add-e3cd46ff8cd6}">
           <p14:sldIdLst>
             <p14:sldId id="258"/>
             <p14:sldId id="259"/>
@@ -135,37 +135,37 @@
             <p14:sldId id="264"/>
           </p14:sldIdLst>
         </p14:section>
-        <p14:section name="연습" id="{8109e553-2dde-f427-7fb7-6e4d6dc5ee2a}">
+        <p14:section name="연습" id="{68a4c080-4859-f371-dab8-9df6953b3417}">
           <p14:sldIdLst>
             <p14:sldId id="261"/>
             <p14:sldId id="263"/>
             <p14:sldId id="265"/>
           </p14:sldIdLst>
         </p14:section>
-        <p14:section name="개념" id="{ca9dd4a6-4fc3-2743-40b2-d2733e1fac97}">
+        <p14:section name="개념" id="{fc3ef325-c008-d697-78b8-5584418c7553}">
           <p14:sldIdLst/>
         </p14:section>
-        <p14:section name="연습" id="{c930a5f9-accf-32b0-4607-feda4322f71d}">
+        <p14:section name="연습" id="{c3c6a830-8b89-31d5-42cf-fe5784bdc100}">
           <p14:sldIdLst/>
         </p14:section>
-        <p14:section name="개념" id="{96709196-94b0-d8ec-454a-ac20227fc015}">
+        <p14:section name="개념" id="{4d0015b6-4583-73ef-6dbd-cc1a8a14e342}">
           <p14:sldIdLst/>
         </p14:section>
-        <p14:section name="연습" id="{58de3fe5-56e2-234f-b52e-451eeaa80a77}">
+        <p14:section name="연습" id="{34a0733b-e3c6-5725-235a-900dc879a727}">
           <p14:sldIdLst/>
         </p14:section>
-        <p14:section name="확인" id="{9c20b76a-9299-db33-0fbe-b5bd736748f8}">
+        <p14:section name="확인" id="{4470495f-d6b3-9d90-c52f-6c5d94d20f78}">
           <p14:sldIdLst>
             <p14:sldId id="266"/>
             <p14:sldId id="267"/>
           </p14:sldIdLst>
         </p14:section>
-        <p14:section name="정리" id="{978d7670-8c9d-59af-6abf-ec721f74f8d4}">
+        <p14:section name="정리" id="{4cc43100-08ed-cb1d-be58-2b870c04e2f9}">
           <p14:sldIdLst>
             <p14:sldId id="268"/>
           </p14:sldIdLst>
         </p14:section>
-        <p14:section name="보충" id="{72d0314d-47f2-1e59-a459-824022fa5102}">
+        <p14:section name="보충" id="{b2eb14b8-f503-653b-2b96-dfef18d68888}">
           <p14:sldIdLst>
             <p14:sldId id="269"/>
           </p14:sldIdLst>

--- a/dist/초5/사회·역사/역사와생활/초5_사회·역사_역사와생활_04_조선.pptx
+++ b/dist/초5/사회·역사/역사와생활/초5_사회·역사_역사와생활_04_조선.pptx
@@ -120,13 +120,13 @@
   <p:extLst>
     <p:ext uri="{521415D9-36F7-43E2-AB2F-B90AF26B5E84}">
       <p14:sectionLst xmlns:p14="http://schemas.microsoft.com/office/powerpoint/2010/main">
-        <p14:section name="도입" id="{ac838675-aadc-735c-5811-5731062a5667}">
+        <p14:section name="도입" id="{6a463ff9-a20a-ccfa-0024-e6118db77b2c}">
           <p14:sldIdLst>
             <p14:sldId id="256"/>
             <p14:sldId id="257"/>
           </p14:sldIdLst>
         </p14:section>
-        <p14:section name="개념" id="{e4c4a5d5-066c-68b6-2add-e3cd46ff8cd6}">
+        <p14:section name="개념" id="{4dc15bf7-20a0-3e16-0611-85264902d96c}">
           <p14:sldIdLst>
             <p14:sldId id="258"/>
             <p14:sldId id="259"/>
@@ -135,37 +135,37 @@
             <p14:sldId id="264"/>
           </p14:sldIdLst>
         </p14:section>
-        <p14:section name="연습" id="{68a4c080-4859-f371-dab8-9df6953b3417}">
+        <p14:section name="연습" id="{ca2d3b71-01f5-0cff-8a61-1142b67f553f}">
           <p14:sldIdLst>
             <p14:sldId id="261"/>
             <p14:sldId id="263"/>
             <p14:sldId id="265"/>
           </p14:sldIdLst>
         </p14:section>
-        <p14:section name="개념" id="{fc3ef325-c008-d697-78b8-5584418c7553}">
+        <p14:section name="개념" id="{419b8f19-9c6d-bd6c-0085-0846972e8a89}">
           <p14:sldIdLst/>
         </p14:section>
-        <p14:section name="연습" id="{c3c6a830-8b89-31d5-42cf-fe5784bdc100}">
+        <p14:section name="연습" id="{16c329ee-c58c-f5fe-79b7-68221bb6dd1c}">
           <p14:sldIdLst/>
         </p14:section>
-        <p14:section name="개념" id="{4d0015b6-4583-73ef-6dbd-cc1a8a14e342}">
+        <p14:section name="개념" id="{e69b85cf-5719-026b-aa71-cb54f2ed2178}">
           <p14:sldIdLst/>
         </p14:section>
-        <p14:section name="연습" id="{34a0733b-e3c6-5725-235a-900dc879a727}">
+        <p14:section name="연습" id="{eabd3d28-62ac-c3f8-493b-0e706758a0f8}">
           <p14:sldIdLst/>
         </p14:section>
-        <p14:section name="확인" id="{4470495f-d6b3-9d90-c52f-6c5d94d20f78}">
+        <p14:section name="확인" id="{6ee50505-bfbf-3364-7b2f-e6fe972c8f36}">
           <p14:sldIdLst>
             <p14:sldId id="266"/>
             <p14:sldId id="267"/>
           </p14:sldIdLst>
         </p14:section>
-        <p14:section name="정리" id="{4cc43100-08ed-cb1d-be58-2b870c04e2f9}">
+        <p14:section name="정리" id="{09ad4259-e7c1-dd94-5d57-ccb3490e91e6}">
           <p14:sldIdLst>
             <p14:sldId id="268"/>
           </p14:sldIdLst>
         </p14:section>
-        <p14:section name="보충" id="{b2eb14b8-f503-653b-2b96-dfef18d68888}">
+        <p14:section name="보충" id="{96a3c376-f4ac-72ef-8228-4e263e3983e4}">
           <p14:sldIdLst>
             <p14:sldId id="269"/>
           </p14:sldIdLst>
